--- a/documentation/Meeting 5.pptx
+++ b/documentation/Meeting 5.pptx
@@ -277,7 +277,7 @@
       <p15:sldGuideLst xmlns:p15="http://schemas.microsoft.com/office/powerpoint/2012/main"/>
     </p:ext>
     <p:ext uri="GoogleSlidesCustomDataVersion2">
-      <go:slidesCustomData xmlns="" xmlns:mc="http://schemas.openxmlformats.org/markup-compatibility/2006" xmlns:mv="urn:schemas-microsoft-com:mac:vml" xmlns:c="http://schemas.openxmlformats.org/drawingml/2006/chart" xmlns:dgm="http://schemas.openxmlformats.org/drawingml/2006/diagram" xmlns:o="urn:schemas-microsoft-com:office:office" xmlns:v="urn:schemas-microsoft-com:vml" xmlns:pvml="urn:schemas-microsoft-com:office:powerpoint" xmlns:com="http://schemas.openxmlformats.org/drawingml/2006/compatibility" xmlns:p14="http://schemas.microsoft.com/office/powerpoint/2010/main" xmlns:p15="http://schemas.microsoft.com/office/powerpoint/2012/main" xmlns:ahyp="http://schemas.microsoft.com/office/drawing/2018/hyperlinkcolor" xmlns:go="http://customooxmlschemas.google.com/" r:id="rId35" roundtripDataSignature="AMtx7mhe1wWgYMlsTmwPP8JtiEZSoLZ/AQ=="/>
+      <go:slidesCustomData xmlns:go="http://customooxmlschemas.google.com/" xmlns:ahyp="http://schemas.microsoft.com/office/drawing/2018/hyperlinkcolor" xmlns:p15="http://schemas.microsoft.com/office/powerpoint/2012/main" xmlns:p14="http://schemas.microsoft.com/office/powerpoint/2010/main" xmlns:com="http://schemas.openxmlformats.org/drawingml/2006/compatibility" xmlns:pvml="urn:schemas-microsoft-com:office:powerpoint" xmlns:v="urn:schemas-microsoft-com:vml" xmlns:o="urn:schemas-microsoft-com:office:office" xmlns:dgm="http://schemas.openxmlformats.org/drawingml/2006/diagram" xmlns:c="http://schemas.openxmlformats.org/drawingml/2006/chart" xmlns:mv="urn:schemas-microsoft-com:mac:vml" xmlns:mc="http://schemas.openxmlformats.org/markup-compatibility/2006" xmlns="" r:id="rId35" roundtripDataSignature="AMtx7mhe1wWgYMlsTmwPP8JtiEZSoLZ/AQ=="/>
     </p:ext>
   </p:extLst>
 </p:presentation>
@@ -16693,7 +16693,6 @@
               <a:rPr lang="en-US" sz="2000" dirty="0" smtClean="0"/>
               <a:t>Trajectory where A and ξ change mid-episode</a:t>
             </a:r>
-            <a:endParaRPr lang="en-US" sz="2000" dirty="0" smtClean="0"/>
           </a:p>
         </p:txBody>
       </p:sp>
@@ -17986,7 +17985,6 @@
               <a:rPr lang="en-US" sz="2000" dirty="0" smtClean="0"/>
               <a:t>Identical. Expected since the MLP does not touch the load tracking. </a:t>
             </a:r>
-            <a:endParaRPr lang="en-US" sz="2000" dirty="0" smtClean="0"/>
           </a:p>
         </p:txBody>
       </p:sp>
@@ -19655,22 +19653,14 @@
             </a:br>
             <a:r>
               <a:rPr lang="en-US" dirty="0" smtClean="0"/>
-              <a:t>Imitation </a:t>
-            </a:r>
-            <a:r>
-              <a:rPr lang="en-US" dirty="0" smtClean="0"/>
-              <a:t>Learning </a:t>
-            </a:r>
-            <a:r>
-              <a:rPr lang="en-US" dirty="0" smtClean="0"/>
-              <a:t>Generalization:</a:t>
+              <a:t>Imitation Learning Generalization:</a:t>
             </a:r>
             <a:endParaRPr dirty="0"/>
           </a:p>
         </p:txBody>
       </p:sp>
-      <mc:AlternateContent xmlns:mc="http://schemas.openxmlformats.org/markup-compatibility/2006">
-        <mc:Choice xmlns:a14="http://schemas.microsoft.com/office/drawing/2010/main" Requires="a14">
+      <mc:AlternateContent xmlns:mc="http://schemas.openxmlformats.org/markup-compatibility/2006" xmlns:a14="http://schemas.microsoft.com/office/drawing/2010/main">
+        <mc:Choice Requires="a14">
           <p:sp>
             <p:nvSpPr>
               <p:cNvPr id="105" name="Google Shape;105;p2"/>
@@ -19944,7 +19934,6 @@
                   <a:rPr lang="en-US" dirty="0" smtClean="0"/>
                   <a:t>)]</a:t>
                 </a:r>
-                <a:endParaRPr lang="en-US" dirty="0" smtClean="0"/>
               </a:p>
               <a:p>
                 <a:pPr lvl="1" indent="-457200">
@@ -19952,11 +19941,7 @@
                 </a:pPr>
                 <a:r>
                   <a:rPr lang="en-US" sz="2000" dirty="0" smtClean="0"/>
-                  <a:t>R</a:t>
-                </a:r>
-                <a:r>
-                  <a:rPr lang="en-US" sz="2000" dirty="0" smtClean="0"/>
-                  <a:t>econstructed carrier velocities</a:t>
+                  <a:t>Reconstructed carrier velocities</a:t>
                 </a:r>
               </a:p>
               <a:p>
@@ -20155,12 +20140,11 @@
                   <a:rPr lang="en-US" sz="2000" dirty="0" smtClean="0"/>
                   <a:t> </a:t>
                 </a:r>
-                <a:endParaRPr lang="en-US" sz="2000" dirty="0" smtClean="0"/>
               </a:p>
             </p:txBody>
           </p:sp>
         </mc:Choice>
-        <mc:Fallback>
+        <mc:Fallback xmlns="">
           <p:sp>
             <p:nvSpPr>
               <p:cNvPr id="105" name="Google Shape;105;p2"/>
@@ -20295,8 +20279,8 @@
           </a:p>
         </p:txBody>
       </p:sp>
-      <mc:AlternateContent xmlns:mc="http://schemas.openxmlformats.org/markup-compatibility/2006">
-        <mc:Choice xmlns:a14="http://schemas.microsoft.com/office/drawing/2010/main" Requires="a14">
+      <mc:AlternateContent xmlns:mc="http://schemas.openxmlformats.org/markup-compatibility/2006" xmlns:a14="http://schemas.microsoft.com/office/drawing/2010/main">
+        <mc:Choice Requires="a14">
           <p:sp>
             <p:nvSpPr>
               <p:cNvPr id="105" name="Google Shape;105;p2"/>
@@ -20331,11 +20315,7 @@
                 </a:pPr>
                 <a:r>
                   <a:rPr lang="en-US" dirty="0" smtClean="0"/>
-                  <a:t>Observation</a:t>
-                </a:r>
-                <a:r>
-                  <a:rPr lang="en-US" dirty="0" smtClean="0"/>
-                  <a:t> Space (Original) </a:t>
+                  <a:t>Observation Space (Original) </a:t>
                 </a:r>
                 <a:r>
                   <a:rPr lang="en-US" dirty="0"/>
@@ -20351,11 +20331,7 @@
                 </a:r>
                 <a:r>
                   <a:rPr lang="en-US" dirty="0" smtClean="0"/>
-                  <a:t> </a:t>
-                </a:r>
-                <a:r>
-                  <a:rPr lang="en-US" dirty="0" smtClean="0"/>
-                  <a:t>: </a:t>
+                  <a:t> : </a:t>
                 </a:r>
               </a:p>
               <a:p>
@@ -20746,7 +20722,7 @@
             </p:txBody>
           </p:sp>
         </mc:Choice>
-        <mc:Fallback>
+        <mc:Fallback xmlns="">
           <p:sp>
             <p:nvSpPr>
               <p:cNvPr id="105" name="Google Shape;105;p2"/>
@@ -20881,8 +20857,8 @@
           </a:p>
         </p:txBody>
       </p:sp>
-      <mc:AlternateContent xmlns:mc="http://schemas.openxmlformats.org/markup-compatibility/2006">
-        <mc:Choice xmlns:a14="http://schemas.microsoft.com/office/drawing/2010/main" Requires="a14">
+      <mc:AlternateContent xmlns:mc="http://schemas.openxmlformats.org/markup-compatibility/2006" xmlns:a14="http://schemas.microsoft.com/office/drawing/2010/main">
+        <mc:Choice Requires="a14">
           <p:sp>
             <p:nvSpPr>
               <p:cNvPr id="105" name="Google Shape;105;p2"/>
@@ -20917,11 +20893,7 @@
                 </a:pPr>
                 <a:r>
                   <a:rPr lang="en-US" dirty="0" smtClean="0"/>
-                  <a:t>Observation</a:t>
-                </a:r>
-                <a:r>
-                  <a:rPr lang="en-US" dirty="0" smtClean="0"/>
-                  <a:t> Space (Augmented) </a:t>
+                  <a:t>Observation Space (Augmented) </a:t>
                 </a:r>
                 <a:r>
                   <a:rPr lang="en-US" dirty="0"/>
@@ -20937,11 +20909,7 @@
                 </a:r>
                 <a:r>
                   <a:rPr lang="en-US" dirty="0" smtClean="0"/>
-                  <a:t> </a:t>
-                </a:r>
-                <a:r>
-                  <a:rPr lang="en-US" dirty="0" smtClean="0"/>
-                  <a:t>:</a:t>
+                  <a:t> :</a:t>
                 </a:r>
               </a:p>
               <a:p>
@@ -20959,15 +20927,7 @@
                 </a:pPr>
                 <a:r>
                   <a:rPr lang="en-US" dirty="0"/>
-                  <a:t>The last two measured load states </a:t>
-                </a:r>
-                <a:r>
-                  <a:rPr lang="en-US" dirty="0"/>
-                  <a:t>∈ </a:t>
-                </a:r>
-                <a:r>
-                  <a:rPr lang="en-US" dirty="0"/>
-                  <a:t>R</a:t>
+                  <a:t>The last two measured load states ∈ R</a:t>
                 </a:r>
                 <a:r>
                   <a:rPr lang="en-US" baseline="30000" dirty="0"/>
@@ -21173,11 +21133,7 @@
                 </a14:m>
                 <a:r>
                   <a:rPr lang="en-US" dirty="0"/>
-                  <a:t>(t</a:t>
-                </a:r>
-                <a:r>
-                  <a:rPr lang="en-US" dirty="0"/>
-                  <a:t>-1)]</a:t>
+                  <a:t>(t-1)]</a:t>
                 </a:r>
               </a:p>
               <a:p>
@@ -21228,17 +21184,8 @@
                 </a14:m>
                 <a:r>
                   <a:rPr lang="en-US" dirty="0"/>
-                  <a:t>(t</a:t>
-                </a:r>
-                <a:r>
-                  <a:rPr lang="en-US" dirty="0"/>
-                  <a:t>-2</a:t>
-                </a:r>
-                <a:r>
-                  <a:rPr lang="en-US" dirty="0"/>
-                  <a:t>)]</a:t>
-                </a:r>
-                <a:endParaRPr lang="en-US" dirty="0"/>
+                  <a:t>(t-2)]</a:t>
+                </a:r>
               </a:p>
               <a:p>
                 <a:pPr lvl="1" indent="-457200">
@@ -21246,11 +21193,7 @@
                 </a:pPr>
                 <a:r>
                   <a:rPr lang="en-US" dirty="0"/>
-                  <a:t>Reference load state at current time </a:t>
-                </a:r>
-                <a:r>
-                  <a:rPr lang="en-US" dirty="0"/>
-                  <a:t>∈ R</a:t>
+                  <a:t>Reference load state at current time ∈ R</a:t>
                 </a:r>
                 <a:r>
                   <a:rPr lang="en-US" baseline="30000" dirty="0"/>
@@ -21260,7 +21203,6 @@
                   <a:rPr lang="en-US" dirty="0"/>
                   <a:t> </a:t>
                 </a:r>
-                <a:endParaRPr lang="en-US" dirty="0"/>
               </a:p>
               <a:p>
                 <a:pPr marL="457200" lvl="1" indent="0">
@@ -21269,11 +21211,7 @@
                 </a:pPr>
                 <a:r>
                   <a:rPr lang="en-US" dirty="0"/>
-                  <a:t>				</a:t>
-                </a:r>
-                <a:r>
-                  <a:rPr lang="en-US" dirty="0"/>
-                  <a:t>[</a:t>
+                  <a:t>				[</a:t>
                 </a:r>
                 <a:r>
                   <a:rPr lang="en-US" dirty="0" err="1"/>
@@ -21337,7 +21275,6 @@
                   <a:rPr lang="en-US" dirty="0"/>
                   <a:t>(t)]</a:t>
                 </a:r>
-                <a:endParaRPr lang="en-US" dirty="0"/>
               </a:p>
               <a:p>
                 <a:pPr indent="-457200">
@@ -21358,7 +21295,7 @@
             </p:txBody>
           </p:sp>
         </mc:Choice>
-        <mc:Fallback>
+        <mc:Fallback xmlns="">
           <p:sp>
             <p:nvSpPr>
               <p:cNvPr id="105" name="Google Shape;105;p2"/>
@@ -21520,7 +21457,7 @@
             </p:spPr>
             <p:txBody>
               <a:bodyPr spcFirstLastPara="1" wrap="square" lIns="91425" tIns="45700" rIns="91425" bIns="45700" anchor="t" anchorCtr="0">
-                <a:normAutofit/>
+                <a:normAutofit fontScale="92500" lnSpcReduction="10000"/>
               </a:bodyPr>
               <a:lstStyle/>
               <a:p>
@@ -21541,7 +21478,7 @@
                 </a:r>
                 <a:r>
                   <a:rPr lang="en-US" baseline="30000" dirty="0" smtClean="0"/>
-                  <a:t>58</a:t>
+                  <a:t>76</a:t>
                 </a:r>
                 <a:endParaRPr lang="en-US" dirty="0" smtClean="0"/>
               </a:p>
@@ -21555,15 +21492,7 @@
                 </a:r>
                 <a:r>
                   <a:rPr lang="en-US" dirty="0"/>
-                  <a:t>load state </a:t>
-                </a:r>
-                <a:r>
-                  <a:rPr lang="en-US" dirty="0"/>
-                  <a:t>∈ </a:t>
-                </a:r>
-                <a:r>
-                  <a:rPr lang="en-US" dirty="0"/>
-                  <a:t>R</a:t>
+                  <a:t>load state ∈ R</a:t>
                 </a:r>
                 <a:r>
                   <a:rPr lang="en-US" baseline="30000" dirty="0"/>
@@ -21581,11 +21510,7 @@
                 </a:pPr>
                 <a:r>
                   <a:rPr lang="en-US" dirty="0"/>
-                  <a:t>	</a:t>
-                </a:r>
-                <a:r>
-                  <a:rPr lang="en-US" dirty="0"/>
-                  <a:t>			[</a:t>
+                  <a:t>				[</a:t>
                 </a:r>
                 <a:r>
                   <a:rPr lang="en-US" dirty="0" err="1"/>
@@ -21597,15 +21522,7 @@
                 </a:r>
                 <a:r>
                   <a:rPr lang="en-US" dirty="0"/>
-                  <a:t>(t</a:t>
-                </a:r>
-                <a:r>
-                  <a:rPr lang="en-US" dirty="0"/>
-                  <a:t>), </a:t>
-                </a:r>
-                <a:r>
-                  <a:rPr lang="en-US" dirty="0"/>
-                  <a:t>R</a:t>
+                  <a:t>(t), R</a:t>
                 </a:r>
                 <a:r>
                   <a:rPr lang="en-US" baseline="-25000" dirty="0"/>
@@ -21613,11 +21530,7 @@
                 </a:r>
                 <a:r>
                   <a:rPr lang="en-US" dirty="0"/>
-                  <a:t>(t</a:t>
-                </a:r>
-                <a:r>
-                  <a:rPr lang="en-US" dirty="0"/>
-                  <a:t>),  </a:t>
+                  <a:t>(t),  </a:t>
                 </a:r>
                 <a14:m>
                   <m:oMath xmlns:m="http://schemas.openxmlformats.org/officeDocument/2006/math">
@@ -21643,11 +21556,7 @@
                 </a:r>
                 <a:r>
                   <a:rPr lang="en-US" dirty="0"/>
-                  <a:t>(t</a:t>
-                </a:r>
-                <a:r>
-                  <a:rPr lang="en-US" dirty="0"/>
-                  <a:t>),  </a:t>
+                  <a:t>(t),  </a:t>
                 </a:r>
                 <a:r>
                   <a:rPr lang="en-US" dirty="0" err="1"/>
@@ -21732,15 +21641,7 @@
                 </a:pPr>
                 <a:r>
                   <a:rPr lang="en-US" dirty="0"/>
-                  <a:t>All carriers’ velocities </a:t>
-                </a:r>
-                <a:r>
-                  <a:rPr lang="en-US" dirty="0"/>
-                  <a:t>∈ </a:t>
-                </a:r>
-                <a:r>
-                  <a:rPr lang="en-US" dirty="0"/>
-                  <a:t>R</a:t>
+                  <a:t>All carriers’ velocities ∈ R</a:t>
                 </a:r>
                 <a:r>
                   <a:rPr lang="en-US" baseline="30000" dirty="0"/>
@@ -21750,7 +21651,6 @@
                   <a:rPr lang="en-US" dirty="0"/>
                   <a:t> </a:t>
                 </a:r>
-                <a:endParaRPr lang="en-US" dirty="0"/>
               </a:p>
               <a:p>
                 <a:pPr marL="457200" lvl="1" indent="0">
@@ -21759,15 +21659,7 @@
                 </a:pPr>
                 <a:r>
                   <a:rPr lang="en-US" dirty="0"/>
-                  <a:t>				</a:t>
-                </a:r>
-                <a:r>
-                  <a:rPr lang="en-US" dirty="0"/>
-                  <a:t> </a:t>
-                </a:r>
-                <a:r>
-                  <a:rPr lang="en-US" dirty="0"/>
-                  <a:t>[</a:t>
+                  <a:t>				 [</a:t>
                 </a:r>
                 <a14:m>
                   <m:oMath xmlns:m="http://schemas.openxmlformats.org/officeDocument/2006/math">
@@ -21803,11 +21695,7 @@
                 </a14:m>
                 <a:r>
                   <a:rPr lang="en-US" dirty="0"/>
-                  <a:t>(t</a:t>
-                </a:r>
-                <a:r>
-                  <a:rPr lang="en-US" dirty="0"/>
-                  <a:t>), </a:t>
+                  <a:t>(t), </a:t>
                 </a:r>
                 <a14:m>
                   <m:oMath xmlns:m="http://schemas.openxmlformats.org/officeDocument/2006/math">
@@ -21843,15 +21731,7 @@
                 </a14:m>
                 <a:r>
                   <a:rPr lang="en-US" dirty="0"/>
-                  <a:t>(t</a:t>
-                </a:r>
-                <a:r>
-                  <a:rPr lang="en-US" dirty="0"/>
-                  <a:t>),</a:t>
-                </a:r>
-                <a:r>
-                  <a:rPr lang="en-US" dirty="0"/>
-                  <a:t> </a:t>
+                  <a:t>(t), </a:t>
                 </a:r>
                 <a14:m>
                   <m:oMath xmlns:m="http://schemas.openxmlformats.org/officeDocument/2006/math">
@@ -21887,15 +21767,7 @@
                 </a14:m>
                 <a:r>
                   <a:rPr lang="en-US" dirty="0"/>
-                  <a:t>(t</a:t>
-                </a:r>
-                <a:r>
-                  <a:rPr lang="en-US" dirty="0"/>
-                  <a:t>),</a:t>
-                </a:r>
-                <a:r>
-                  <a:rPr lang="en-US" dirty="0"/>
-                  <a:t> </a:t>
+                  <a:t>(t), </a:t>
                 </a:r>
                 <a14:m>
                   <m:oMath xmlns:m="http://schemas.openxmlformats.org/officeDocument/2006/math">
@@ -21971,11 +21843,7 @@
                 </a:pPr>
                 <a:r>
                   <a:rPr lang="en-US" dirty="0"/>
-                  <a:t>				</a:t>
-                </a:r>
-                <a:r>
-                  <a:rPr lang="en-US" dirty="0"/>
-                  <a:t>[</a:t>
+                  <a:t>				[</a:t>
                 </a:r>
                 <a:r>
                   <a:rPr lang="en-US" dirty="0" smtClean="0"/>
@@ -22047,8 +21915,106 @@
                   <a:buSzPts val="3200"/>
                 </a:pPr>
                 <a:r>
+                  <a:rPr lang="en-US" dirty="0"/>
+                  <a:t>Reference load state at current time ∈ R</a:t>
+                </a:r>
+                <a:r>
+                  <a:rPr lang="en-US" baseline="30000" dirty="0"/>
+                  <a:t>18</a:t>
+                </a:r>
+                <a:r>
+                  <a:rPr lang="en-US" dirty="0"/>
+                  <a:t> </a:t>
+                </a:r>
+              </a:p>
+              <a:p>
+                <a:pPr marL="457200" lvl="1" indent="0">
+                  <a:buSzPts val="3200"/>
+                  <a:buNone/>
+                </a:pPr>
+                <a:r>
+                  <a:rPr lang="en-US" dirty="0"/>
+                  <a:t>				[</a:t>
+                </a:r>
+                <a:r>
+                  <a:rPr lang="en-US" dirty="0" err="1"/>
+                  <a:t>p</a:t>
+                </a:r>
+                <a:r>
+                  <a:rPr lang="en-US" baseline="-25000" dirty="0" err="1"/>
+                  <a:t>Ld</a:t>
+                </a:r>
+                <a:r>
+                  <a:rPr lang="en-US" dirty="0"/>
+                  <a:t>(t), </a:t>
+                </a:r>
+                <a:r>
+                  <a:rPr lang="en-US" dirty="0" err="1"/>
+                  <a:t>R</a:t>
+                </a:r>
+                <a:r>
+                  <a:rPr lang="en-US" baseline="-25000" dirty="0" err="1"/>
+                  <a:t>Ld</a:t>
+                </a:r>
+                <a:r>
+                  <a:rPr lang="en-US" dirty="0"/>
+                  <a:t>(t),  </a:t>
+                </a:r>
+                <a14:m>
+                  <m:oMath xmlns:m="http://schemas.openxmlformats.org/officeDocument/2006/math">
+                    <m:r>
+                      <m:rPr>
+                        <m:nor/>
+                      </m:rPr>
+                      <a:rPr lang="en-US"/>
+                      <m:t>p</m:t>
+                    </m:r>
+                    <m:r>
+                      <m:rPr>
+                        <m:nor/>
+                      </m:rPr>
+                      <a:rPr lang="en-US"/>
+                      <m:t>̇</m:t>
+                    </m:r>
+                  </m:oMath>
+                </a14:m>
+                <a:r>
+                  <a:rPr lang="en-US" baseline="-25000" dirty="0" err="1"/>
+                  <a:t>Ld</a:t>
+                </a:r>
+                <a:r>
+                  <a:rPr lang="en-US" dirty="0"/>
+                  <a:t>(t),  </a:t>
+                </a:r>
+                <a:r>
+                  <a:rPr lang="en-US" dirty="0" err="1"/>
+                  <a:t>ω</a:t>
+                </a:r>
+                <a:r>
+                  <a:rPr lang="en-US" baseline="-25000" dirty="0" err="1"/>
+                  <a:t>Ld</a:t>
+                </a:r>
+                <a:r>
+                  <a:rPr lang="en-US" dirty="0"/>
+                  <a:t>(t</a:t>
+                </a:r>
+                <a:r>
                   <a:rPr lang="en-US" dirty="0" smtClean="0"/>
-                  <a:t>Delay of each carrier load measurement </a:t>
+                  <a:t>)]</a:t>
+                </a:r>
+                <a:endParaRPr lang="en-US" dirty="0" smtClean="0"/>
+              </a:p>
+              <a:p>
+                <a:pPr lvl="1" indent="-457200">
+                  <a:buSzPts val="3200"/>
+                </a:pPr>
+                <a:r>
+                  <a:rPr lang="en-US" dirty="0" smtClean="0"/>
+                  <a:t>Delay </a:t>
+                </a:r>
+                <a:r>
+                  <a:rPr lang="en-US" dirty="0" smtClean="0"/>
+                  <a:t>of each carrier load measurement </a:t>
                 </a:r>
                 <a:r>
                   <a:rPr lang="en-US" dirty="0"/>
@@ -22075,7 +22041,11 @@
                 </a:r>
                 <a:r>
                   <a:rPr lang="en-US" dirty="0" smtClean="0"/>
-                  <a:t>				[d</a:t>
+                  <a:t>				[</a:t>
+                </a:r>
+                <a:r>
+                  <a:rPr lang="en-US" dirty="0" smtClean="0"/>
+                  <a:t>d</a:t>
                 </a:r>
                 <a:r>
                   <a:rPr lang="en-US" baseline="-25000" dirty="0" smtClean="0"/>
@@ -22109,7 +22079,13 @@
                   <a:rPr lang="en-US" dirty="0" smtClean="0"/>
                   <a:t>]</a:t>
                 </a:r>
-                <a:endParaRPr lang="en-US" dirty="0"/>
+              </a:p>
+              <a:p>
+                <a:pPr marL="457200" lvl="1" indent="0">
+                  <a:buSzPts val="3200"/>
+                  <a:buNone/>
+                </a:pPr>
+                <a:endParaRPr lang="en-US" dirty="0" smtClean="0"/>
               </a:p>
               <a:p>
                 <a:pPr marL="457200" lvl="1" indent="0">
@@ -22145,7 +22121,7 @@
               <a:blipFill rotWithShape="0">
                 <a:blip r:embed="rId3"/>
                 <a:stretch>
-                  <a:fillRect l="-1231" t="-126"/>
+                  <a:fillRect l="-1231" t="-1384"/>
                 </a:stretch>
               </a:blipFill>
               <a:ln>
@@ -22258,8 +22234,8 @@
           </a:p>
         </p:txBody>
       </p:sp>
-      <mc:AlternateContent xmlns:mc="http://schemas.openxmlformats.org/markup-compatibility/2006">
-        <mc:Choice xmlns:a14="http://schemas.microsoft.com/office/drawing/2010/main" Requires="a14">
+      <mc:AlternateContent xmlns:mc="http://schemas.openxmlformats.org/markup-compatibility/2006" xmlns:a14="http://schemas.microsoft.com/office/drawing/2010/main">
+        <mc:Choice Requires="a14">
           <p:sp>
             <p:nvSpPr>
               <p:cNvPr id="105" name="Google Shape;105;p2"/>
@@ -22822,25 +22798,7 @@
                                   </a:solidFill>
                                   <a:latin typeface="Cambria Math" panose="02040503050406030204" pitchFamily="18" charset="0"/>
                                 </a:rPr>
-                                <m:t>𝑜𝑣𝑒𝑟𝑠</m:t>
-                              </m:r>
-                              <m:r>
-                                <a:rPr lang="en-US" sz="1800" i="1">
-                                  <a:solidFill>
-                                    <a:srgbClr val="000000"/>
-                                  </a:solidFill>
-                                  <a:latin typeface="Cambria Math" panose="02040503050406030204" pitchFamily="18" charset="0"/>
-                                </a:rPr>
-                                <m:t>h</m:t>
-                              </m:r>
-                              <m:r>
-                                <a:rPr lang="en-US" sz="1800" i="1">
-                                  <a:solidFill>
-                                    <a:srgbClr val="000000"/>
-                                  </a:solidFill>
-                                  <a:latin typeface="Cambria Math" panose="02040503050406030204" pitchFamily="18" charset="0"/>
-                                </a:rPr>
-                                <m:t>𝑜𝑜𝑡</m:t>
+                                <m:t>𝑜𝑣𝑒𝑟𝑠h𝑜𝑜𝑡</m:t>
                               </m:r>
                             </m:sub>
                           </m:sSub>
@@ -22851,25 +22809,7 @@
                               </a:solidFill>
                               <a:latin typeface="Cambria Math" panose="02040503050406030204" pitchFamily="18" charset="0"/>
                             </a:rPr>
-                            <m:t>𝑜𝑣𝑒𝑟𝑠</m:t>
-                          </m:r>
-                          <m:r>
-                            <a:rPr lang="en-US" sz="1800" i="1">
-                              <a:solidFill>
-                                <a:srgbClr val="000000"/>
-                              </a:solidFill>
-                              <a:latin typeface="Cambria Math" panose="02040503050406030204" pitchFamily="18" charset="0"/>
-                            </a:rPr>
-                            <m:t>h</m:t>
-                          </m:r>
-                          <m:r>
-                            <a:rPr lang="en-US" sz="1800" i="1">
-                              <a:solidFill>
-                                <a:srgbClr val="000000"/>
-                              </a:solidFill>
-                              <a:latin typeface="Cambria Math" panose="02040503050406030204" pitchFamily="18" charset="0"/>
-                            </a:rPr>
-                            <m:t>𝑜𝑜</m:t>
+                            <m:t>𝑜𝑣𝑒𝑟𝑠h𝑜𝑜</m:t>
                           </m:r>
                           <m:sSub>
                             <m:sSubPr>
@@ -22946,56 +22886,70 @@
                       <m:sSub>
                         <m:sSubPr>
                           <m:ctrlPr>
-                            <a:rPr lang="en-US" sz="2000" i="1"/>
+                            <a:rPr lang="en-US" sz="2000" i="1">
+                              <a:latin typeface="Cambria Math" panose="02040503050406030204" pitchFamily="18" charset="0"/>
+                            </a:rPr>
                           </m:ctrlPr>
                         </m:sSubPr>
                         <m:e>
                           <m:r>
-                            <a:rPr lang="en-US" sz="2000" i="1"/>
+                            <a:rPr lang="en-US" sz="2000" i="1">
+                              <a:latin typeface="Cambria Math" panose="02040503050406030204" pitchFamily="18" charset="0"/>
+                            </a:rPr>
                             <m:t>𝑅</m:t>
                           </m:r>
                         </m:e>
                         <m:sub>
                           <m:r>
-                            <a:rPr lang="en-US" sz="2000" i="1"/>
+                            <a:rPr lang="en-US" sz="2000" i="1">
+                              <a:latin typeface="Cambria Math" panose="02040503050406030204" pitchFamily="18" charset="0"/>
+                            </a:rPr>
                             <m:t>𝑡𝑒𝑎𝑚</m:t>
                           </m:r>
                         </m:sub>
                       </m:sSub>
                       <m:r>
-                        <a:rPr lang="en-US" sz="2000" i="1"/>
+                        <a:rPr lang="en-US" sz="2000" i="1">
+                          <a:latin typeface="Cambria Math" panose="02040503050406030204" pitchFamily="18" charset="0"/>
+                        </a:rPr>
                         <m:t>= </m:t>
                       </m:r>
                       <m:nary>
                         <m:naryPr>
                           <m:chr m:val="∑"/>
                           <m:ctrlPr>
-                            <a:rPr lang="en-US" sz="2000" i="1"/>
+                            <a:rPr lang="en-US" sz="2000" i="1">
+                              <a:latin typeface="Cambria Math" panose="02040503050406030204" pitchFamily="18" charset="0"/>
+                            </a:rPr>
                           </m:ctrlPr>
                         </m:naryPr>
                         <m:sub>
                           <m:r>
-                            <a:rPr lang="en-US" sz="2000" i="1"/>
+                            <a:rPr lang="en-US" sz="2000" i="1">
+                              <a:latin typeface="Cambria Math" panose="02040503050406030204" pitchFamily="18" charset="0"/>
+                            </a:rPr>
                             <m:t>𝑖</m:t>
                           </m:r>
                           <m:r>
-                            <a:rPr lang="en-US" sz="2000" i="1"/>
-                            <m:t>=</m:t>
-                          </m:r>
-                          <m:r>
-                            <a:rPr lang="en-US" sz="2000" i="1"/>
-                            <m:t>1</m:t>
+                            <a:rPr lang="en-US" sz="2000" i="1">
+                              <a:latin typeface="Cambria Math" panose="02040503050406030204" pitchFamily="18" charset="0"/>
+                            </a:rPr>
+                            <m:t>=1</m:t>
                           </m:r>
                         </m:sub>
                         <m:sup>
                           <m:r>
-                            <a:rPr lang="en-US" sz="2000" i="1"/>
+                            <a:rPr lang="en-US" sz="2000" i="1">
+                              <a:latin typeface="Cambria Math" panose="02040503050406030204" pitchFamily="18" charset="0"/>
+                            </a:rPr>
                             <m:t>𝑁</m:t>
                           </m:r>
                         </m:sup>
                         <m:e>
                           <m:r>
-                            <a:rPr lang="en-US" sz="2000" i="1"/>
+                            <a:rPr lang="en-US" sz="2000" i="1">
+                              <a:latin typeface="Cambria Math" panose="02040503050406030204" pitchFamily="18" charset="0"/>
+                            </a:rPr>
                             <m:t>𝑟𝑖</m:t>
                           </m:r>
                         </m:e>
@@ -23008,7 +22962,7 @@
             </p:txBody>
           </p:sp>
         </mc:Choice>
-        <mc:Fallback>
+        <mc:Fallback xmlns="">
           <p:sp>
             <p:nvSpPr>
               <p:cNvPr id="105" name="Google Shape;105;p2"/>
@@ -23143,8 +23097,8 @@
           </a:p>
         </p:txBody>
       </p:sp>
-      <mc:AlternateContent xmlns:mc="http://schemas.openxmlformats.org/markup-compatibility/2006">
-        <mc:Choice xmlns:a14="http://schemas.microsoft.com/office/drawing/2010/main" Requires="a14">
+      <mc:AlternateContent xmlns:mc="http://schemas.openxmlformats.org/markup-compatibility/2006" xmlns:a14="http://schemas.microsoft.com/office/drawing/2010/main">
+        <mc:Choice Requires="a14">
           <p:sp>
             <p:nvSpPr>
               <p:cNvPr id="105" name="Google Shape;105;p2"/>
@@ -24007,7 +23961,7 @@
             </p:txBody>
           </p:sp>
         </mc:Choice>
-        <mc:Fallback>
+        <mc:Fallback xmlns="">
           <p:sp>
             <p:nvSpPr>
               <p:cNvPr id="105" name="Google Shape;105;p2"/>
@@ -24051,8 +24005,8 @@
           </p:sp>
         </mc:Fallback>
       </mc:AlternateContent>
-      <mc:AlternateContent xmlns:mc="http://schemas.openxmlformats.org/markup-compatibility/2006">
-        <mc:Choice xmlns:a14="http://schemas.microsoft.com/office/drawing/2010/main" Requires="a14">
+      <mc:AlternateContent xmlns:mc="http://schemas.openxmlformats.org/markup-compatibility/2006" xmlns:a14="http://schemas.microsoft.com/office/drawing/2010/main">
+        <mc:Choice Requires="a14">
           <p:graphicFrame>
             <p:nvGraphicFramePr>
               <p:cNvPr id="5" name="Table 4"/>
@@ -24677,7 +24631,6 @@
                             <a:rPr lang="en-US" sz="1400" dirty="0" smtClean="0"/>
                             <a:t>)</a:t>
                           </a:r>
-                          <a:endParaRPr lang="en-US" sz="1400" dirty="0" smtClean="0"/>
                         </a:p>
                       </a:txBody>
                       <a:tcPr/>
@@ -24959,11 +24912,7 @@
                           </a:r>
                           <a:r>
                             <a:rPr lang="en-US" sz="1400" baseline="0" dirty="0" smtClean="0"/>
-                            <a:t> from taking actions above the allowed </a:t>
-                          </a:r>
-                          <a:r>
-                            <a:rPr lang="en-US" sz="1400" baseline="0" dirty="0" smtClean="0"/>
-                            <a:t>fraction of the base controller magnitude (dead gradient, no learning). The cap prevents the policy from taking overly aggressive actions.</a:t>
+                            <a:t> from taking actions above the allowed fraction of the base controller magnitude (dead gradient, no learning). The cap prevents the policy from taking overly aggressive actions.</a:t>
                           </a:r>
                           <a:endParaRPr sz="1400" dirty="0"/>
                         </a:p>
@@ -24976,7 +24925,7 @@
             </a:graphic>
           </p:graphicFrame>
         </mc:Choice>
-        <mc:Fallback>
+        <mc:Fallback xmlns="">
           <p:graphicFrame>
             <p:nvGraphicFramePr>
               <p:cNvPr id="5" name="Table 4"/>
@@ -25874,11 +25823,7 @@
             </a:pPr>
             <a:r>
               <a:rPr lang="en-US" dirty="0" smtClean="0"/>
-              <a:t>Residual MARL</a:t>
-            </a:r>
-            <a:r>
-              <a:rPr lang="en-US" dirty="0" smtClean="0"/>
-              <a:t>: Some Results</a:t>
+              <a:t>Residual MARL: Some Results</a:t>
             </a:r>
             <a:endParaRPr dirty="0"/>
           </a:p>
@@ -26625,11 +26570,7 @@
             </a:br>
             <a:r>
               <a:rPr lang="en-US" dirty="0" smtClean="0"/>
-              <a:t>Formulation </a:t>
-            </a:r>
-            <a:r>
-              <a:rPr lang="en-US" dirty="0" smtClean="0"/>
-              <a:t>1 Generalization:</a:t>
+              <a:t>Formulation 1 Generalization:</a:t>
             </a:r>
             <a:endParaRPr dirty="0"/>
           </a:p>
@@ -26742,7 +26683,6 @@
               <a:rPr lang="en-US" sz="2000" dirty="0" smtClean="0"/>
               <a:t> </a:t>
             </a:r>
-            <a:endParaRPr lang="en-US" sz="2000" dirty="0" smtClean="0"/>
           </a:p>
         </p:txBody>
       </p:sp>
@@ -26888,7 +26828,6 @@
               <a:rPr lang="en-US" sz="2000" dirty="0" smtClean="0"/>
               <a:t>trajectory(not seen during training)</a:t>
             </a:r>
-            <a:endParaRPr lang="en-US" sz="2000" dirty="0" smtClean="0"/>
           </a:p>
         </p:txBody>
       </p:sp>
@@ -27230,7 +27169,6 @@
               <a:rPr lang="en-US" sz="2000" dirty="0" smtClean="0"/>
               <a:t>Generalization across time</a:t>
             </a:r>
-            <a:endParaRPr lang="en-US" sz="2000" dirty="0" smtClean="0"/>
           </a:p>
         </p:txBody>
       </p:sp>
